--- a/MECH191_metallurgy/slideDecks/pptx/MECH191_Week7_Lecture.pptx
+++ b/MECH191_metallurgy/slideDecks/pptx/MECH191_Week7_Lecture.pptx
@@ -12380,7 +12380,7 @@
         </p:spPr>
         <p:txBody>
           <a:bodyPr wrap="none" lIns="0" rIns="0" tIns="0" bIns="0">
-            <a:spAutoFit/>
+            <a:noAutofit/>
           </a:bodyPr>
           <a:lstStyle/>
           <a:p>
@@ -12391,7 +12391,7 @@
                 </a:solidFill>
                 <a:latin typeface="Calibri"/>
               </a:rPr>
-              <a:t>Metallography Lab — Module 6</a:t>
+              <a:t>Alloy Research Portfolio — Module 6</a:t>
             </a:r>
           </a:p>
         </p:txBody>
@@ -12414,7 +12414,7 @@
         </p:spPr>
         <p:txBody>
           <a:bodyPr wrap="none" lIns="0" rIns="0" tIns="0" bIns="0">
-            <a:spAutoFit/>
+            <a:noAutofit/>
           </a:bodyPr>
           <a:lstStyle/>
           <a:p>
@@ -12425,7 +12425,7 @@
                 </a:solidFill>
                 <a:latin typeface="Calibri"/>
               </a:rPr>
-              <a:t>EXAMET-5-R-600-HD  ·  50–500×</a:t>
+              <a:t>No Microscope Required</a:t>
             </a:r>
           </a:p>
         </p:txBody>
@@ -12550,7 +12550,7 @@
         </p:spPr>
         <p:txBody>
           <a:bodyPr wrap="none" lIns="0" rIns="0" tIns="0" bIns="0">
-            <a:spAutoFit/>
+            <a:noAutofit/>
           </a:bodyPr>
           <a:lstStyle/>
           <a:p>
@@ -12561,7 +12561,7 @@
                 </a:solidFill>
                 <a:latin typeface="Calibri"/>
               </a:rPr>
-              <a:t>Complete ASTM E112 grain size intercept count on Specimen A (1018 steel). </a:t>
+              <a:t>Research published ASTM E112 grain size and HV for 1018 and 1045 steel —</a:t>
             </a:r>
           </a:p>
         </p:txBody>
@@ -12584,7 +12584,7 @@
         </p:spPr>
         <p:txBody>
           <a:bodyPr wrap="none" lIns="0" rIns="0" tIns="0" bIns="0">
-            <a:spAutoFit/>
+            <a:noAutofit/>
           </a:bodyPr>
           <a:lstStyle/>
           <a:p>
@@ -12595,7 +12595,7 @@
                 </a:solidFill>
                 <a:latin typeface="Calibri"/>
               </a:rPr>
-              <a:t>Measure and calculate HV from indent on both specimens.</a:t>
+              <a:t>record both in your Hardness Log.</a:t>
             </a:r>
           </a:p>
         </p:txBody>
@@ -12652,7 +12652,7 @@
         </p:spPr>
         <p:txBody>
           <a:bodyPr wrap="none" lIns="0" rIns="0" tIns="0" bIns="0">
-            <a:spAutoFit/>
+            <a:noAutofit/>
           </a:bodyPr>
           <a:lstStyle/>
           <a:p>
@@ -12663,7 +12663,7 @@
                 </a:solidFill>
                 <a:latin typeface="Calibri"/>
               </a:rPr>
-              <a:t>1  Observe — complete feature table</a:t>
+              <a:t>1  Research — record data &amp; sources</a:t>
             </a:r>
           </a:p>
         </p:txBody>
@@ -12686,7 +12686,7 @@
         </p:spPr>
         <p:txBody>
           <a:bodyPr wrap="none" lIns="0" rIns="0" tIns="0" bIns="0">
-            <a:spAutoFit/>
+            <a:noAutofit/>
           </a:bodyPr>
           <a:lstStyle/>
           <a:p>
@@ -12697,7 +12697,7 @@
                 </a:solidFill>
                 <a:latin typeface="Calibri"/>
               </a:rPr>
-              <a:t>2  Sketch — label magnification &amp; specimen</a:t>
+              <a:t>2  Answer — short-answer questions</a:t>
             </a:r>
           </a:p>
         </p:txBody>
@@ -12720,7 +12720,7 @@
         </p:spPr>
         <p:txBody>
           <a:bodyPr wrap="none" lIns="0" rIns="0" tIns="0" bIns="0">
-            <a:spAutoFit/>
+            <a:noAutofit/>
           </a:bodyPr>
           <a:lstStyle/>
           <a:p>
@@ -12731,7 +12731,7 @@
                 </a:solidFill>
                 <a:latin typeface="Calibri"/>
               </a:rPr>
-              <a:t>3  Answer — 4 short questions</a:t>
+              <a:t>3  Apply — critical-thinking &amp; equations</a:t>
             </a:r>
           </a:p>
         </p:txBody>
@@ -12765,7 +12765,7 @@
                 </a:solidFill>
                 <a:latin typeface="Calibri"/>
               </a:rPr>
-              <a:t>Specimens to Check Out</a:t>
+              <a:t>Alloys of Record</a:t>
             </a:r>
           </a:p>
         </p:txBody>
@@ -12799,7 +12799,7 @@
                 </a:solidFill>
                 <a:latin typeface="Calibri"/>
               </a:rPr>
-              <a:t>· Specimen A — 1018 steel (Vickers indent)</a:t>
+              <a:t>· Alloy A — 1018 steel (ref. HV)</a:t>
             </a:r>
           </a:p>
         </p:txBody>
@@ -12833,7 +12833,7 @@
                 </a:solidFill>
                 <a:latin typeface="Calibri"/>
               </a:rPr>
-              <a:t>· Specimen B — 1045 steel (Vickers indent)</a:t>
+              <a:t>· Alloy B — 1045 steel (ref. HV)</a:t>
             </a:r>
           </a:p>
         </p:txBody>
@@ -12856,7 +12856,7 @@
         </p:spPr>
         <p:txBody>
           <a:bodyPr wrap="none" lIns="0" rIns="0" tIns="0" bIns="0">
-            <a:spAutoFit/>
+            <a:noAutofit/>
           </a:bodyPr>
           <a:lstStyle/>
           <a:p>
@@ -12867,7 +12867,7 @@
                 </a:solidFill>
                 <a:latin typeface="Calibri"/>
               </a:rPr>
-              <a:t>How to check out the kit:</a:t>
+              <a:t>How to Complete This Module:</a:t>
             </a:r>
           </a:p>
         </p:txBody>
@@ -12890,7 +12890,7 @@
         </p:spPr>
         <p:txBody>
           <a:bodyPr wrap="none" lIns="0" rIns="0" tIns="0" bIns="0">
-            <a:spAutoFit/>
+            <a:noAutofit/>
           </a:bodyPr>
           <a:lstStyle/>
           <a:p>
@@ -12901,7 +12901,7 @@
                 </a:solidFill>
                 <a:latin typeface="Calibri"/>
               </a:rPr>
-              <a:t>1  See instructor after class today</a:t>
+              <a:t>1  Research the alloy(s) using credible sources</a:t>
             </a:r>
           </a:p>
         </p:txBody>
@@ -12924,7 +12924,7 @@
         </p:spPr>
         <p:txBody>
           <a:bodyPr wrap="none" lIns="0" rIns="0" tIns="0" bIns="0">
-            <a:spAutoFit/>
+            <a:noAutofit/>
           </a:bodyPr>
           <a:lstStyle/>
           <a:p>
@@ -12935,7 +12935,7 @@
                 </a:solidFill>
                 <a:latin typeface="Calibri"/>
               </a:rPr>
-              <a:t>2  Sign out the specimen tray</a:t>
+              <a:t>2  Record data with a source citation</a:t>
             </a:r>
           </a:p>
         </p:txBody>
@@ -12958,7 +12958,7 @@
         </p:spPr>
         <p:txBody>
           <a:bodyPr wrap="none" lIns="0" rIns="0" tIns="0" bIns="0">
-            <a:spAutoFit/>
+            <a:noAutofit/>
           </a:bodyPr>
           <a:lstStyle/>
           <a:p>
@@ -12969,7 +12969,7 @@
                 </a:solidFill>
                 <a:latin typeface="Calibri"/>
               </a:rPr>
-              <a:t>3  Use the EXAMET-5 at your convenience</a:t>
+              <a:t>3  Answer the short-answer questions</a:t>
             </a:r>
           </a:p>
         </p:txBody>
@@ -12992,7 +12992,7 @@
         </p:spPr>
         <p:txBody>
           <a:bodyPr wrap="none" lIns="0" rIns="0" tIns="0" bIns="0">
-            <a:spAutoFit/>
+            <a:noAutofit/>
           </a:bodyPr>
           <a:lstStyle/>
           <a:p>
@@ -13003,7 +13003,7 @@
                 </a:solidFill>
                 <a:latin typeface="Calibri"/>
               </a:rPr>
-              <a:t>4  Return kit before leaving class</a:t>
+              <a:t>4  Answer the critical-thinking questions</a:t>
             </a:r>
           </a:p>
         </p:txBody>
@@ -13026,7 +13026,7 @@
         </p:spPr>
         <p:txBody>
           <a:bodyPr wrap="none" lIns="0" rIns="0" tIns="0" bIns="0">
-            <a:spAutoFit/>
+            <a:noAutofit/>
           </a:bodyPr>
           <a:lstStyle/>
           <a:p>
@@ -13037,7 +13037,7 @@
                 </a:solidFill>
                 <a:latin typeface="Calibri"/>
               </a:rPr>
-              <a:t>5  Submit completed module with your portfolio</a:t>
+              <a:t>5  Keep the module with your portfolio</a:t>
             </a:r>
           </a:p>
         </p:txBody>
